--- a/For System administrators/3 DNS/Настройка DNS.pptx
+++ b/For System administrators/3 DNS/Настройка DNS.pptx
@@ -309,7 +309,7 @@
           <a:p>
             <a:fld id="{B4C71EC6-210F-42DE-9C53-41977AD35B3D}" type="datetimeFigureOut">
               <a:rPr lang="ru-RU" smtClean="0"/>
-              <a:t>01.05.2024</a:t>
+              <a:t>17.10.2026</a:t>
             </a:fld>
             <a:endParaRPr lang="ru-RU"/>
           </a:p>
@@ -474,7 +474,7 @@
           <a:p>
             <a:fld id="{B4C71EC6-210F-42DE-9C53-41977AD35B3D}" type="datetimeFigureOut">
               <a:rPr lang="ru-RU" smtClean="0"/>
-              <a:t>01.05.2024</a:t>
+              <a:t>17.10.2026</a:t>
             </a:fld>
             <a:endParaRPr lang="ru-RU"/>
           </a:p>
@@ -649,7 +649,7 @@
           <a:p>
             <a:fld id="{B4C71EC6-210F-42DE-9C53-41977AD35B3D}" type="datetimeFigureOut">
               <a:rPr lang="ru-RU" smtClean="0"/>
-              <a:t>01.05.2024</a:t>
+              <a:t>17.10.2026</a:t>
             </a:fld>
             <a:endParaRPr lang="ru-RU"/>
           </a:p>
@@ -814,7 +814,7 @@
           <a:p>
             <a:fld id="{B4C71EC6-210F-42DE-9C53-41977AD35B3D}" type="datetimeFigureOut">
               <a:rPr lang="ru-RU" smtClean="0"/>
-              <a:t>01.05.2024</a:t>
+              <a:t>17.10.2026</a:t>
             </a:fld>
             <a:endParaRPr lang="ru-RU"/>
           </a:p>
@@ -1055,7 +1055,7 @@
           <a:p>
             <a:fld id="{B4C71EC6-210F-42DE-9C53-41977AD35B3D}" type="datetimeFigureOut">
               <a:rPr lang="ru-RU" smtClean="0"/>
-              <a:t>01.05.2024</a:t>
+              <a:t>17.10.2026</a:t>
             </a:fld>
             <a:endParaRPr lang="ru-RU"/>
           </a:p>
@@ -1338,7 +1338,7 @@
           <a:p>
             <a:fld id="{B4C71EC6-210F-42DE-9C53-41977AD35B3D}" type="datetimeFigureOut">
               <a:rPr lang="ru-RU" smtClean="0"/>
-              <a:t>01.05.2024</a:t>
+              <a:t>17.10.2026</a:t>
             </a:fld>
             <a:endParaRPr lang="ru-RU"/>
           </a:p>
@@ -1755,7 +1755,7 @@
           <a:p>
             <a:fld id="{B4C71EC6-210F-42DE-9C53-41977AD35B3D}" type="datetimeFigureOut">
               <a:rPr lang="ru-RU" smtClean="0"/>
-              <a:t>01.05.2024</a:t>
+              <a:t>17.10.2026</a:t>
             </a:fld>
             <a:endParaRPr lang="ru-RU"/>
           </a:p>
@@ -1868,7 +1868,7 @@
           <a:p>
             <a:fld id="{B4C71EC6-210F-42DE-9C53-41977AD35B3D}" type="datetimeFigureOut">
               <a:rPr lang="ru-RU" smtClean="0"/>
-              <a:t>01.05.2024</a:t>
+              <a:t>17.10.2026</a:t>
             </a:fld>
             <a:endParaRPr lang="ru-RU"/>
           </a:p>
@@ -1958,7 +1958,7 @@
           <a:p>
             <a:fld id="{B4C71EC6-210F-42DE-9C53-41977AD35B3D}" type="datetimeFigureOut">
               <a:rPr lang="ru-RU" smtClean="0"/>
-              <a:t>01.05.2024</a:t>
+              <a:t>17.10.2026</a:t>
             </a:fld>
             <a:endParaRPr lang="ru-RU"/>
           </a:p>
@@ -2230,7 +2230,7 @@
           <a:p>
             <a:fld id="{B4C71EC6-210F-42DE-9C53-41977AD35B3D}" type="datetimeFigureOut">
               <a:rPr lang="ru-RU" smtClean="0"/>
-              <a:t>01.05.2024</a:t>
+              <a:t>17.10.2026</a:t>
             </a:fld>
             <a:endParaRPr lang="ru-RU"/>
           </a:p>
@@ -2478,7 +2478,7 @@
           <a:p>
             <a:fld id="{B4C71EC6-210F-42DE-9C53-41977AD35B3D}" type="datetimeFigureOut">
               <a:rPr lang="ru-RU" smtClean="0"/>
-              <a:t>01.05.2024</a:t>
+              <a:t>17.10.2026</a:t>
             </a:fld>
             <a:endParaRPr lang="ru-RU"/>
           </a:p>
@@ -2686,7 +2686,7 @@
           <a:p>
             <a:fld id="{B4C71EC6-210F-42DE-9C53-41977AD35B3D}" type="datetimeFigureOut">
               <a:rPr lang="ru-RU" smtClean="0"/>
-              <a:t>01.05.2024</a:t>
+              <a:t>17.10.2026</a:t>
             </a:fld>
             <a:endParaRPr lang="ru-RU"/>
           </a:p>
@@ -3072,14 +3072,38 @@
           <a:lstStyle/>
           <a:p>
             <a:r>
-              <a:rPr lang="ru-RU" dirty="0"/>
+              <a:rPr lang="ru-RU" dirty="0">
+                <a:effectLst>
+                  <a:outerShdw blurRad="38100" dist="38100" dir="2700000" algn="tl">
+                    <a:srgbClr val="000000">
+                      <a:alpha val="43137"/>
+                    </a:srgbClr>
+                  </a:outerShdw>
+                </a:effectLst>
+              </a:rPr>
               <a:t>Настройка </a:t>
             </a:r>
             <a:r>
-              <a:rPr lang="en-US" dirty="0"/>
+              <a:rPr lang="en-US" dirty="0">
+                <a:effectLst>
+                  <a:outerShdw blurRad="38100" dist="38100" dir="2700000" algn="tl">
+                    <a:srgbClr val="000000">
+                      <a:alpha val="43137"/>
+                    </a:srgbClr>
+                  </a:outerShdw>
+                </a:effectLst>
+              </a:rPr>
               <a:t>DNS</a:t>
             </a:r>
-            <a:endParaRPr lang="ru-RU" dirty="0"/>
+            <a:endParaRPr lang="ru-RU" dirty="0">
+              <a:effectLst>
+                <a:outerShdw blurRad="38100" dist="38100" dir="2700000" algn="tl">
+                  <a:srgbClr val="000000">
+                    <a:alpha val="43137"/>
+                  </a:srgbClr>
+                </a:outerShdw>
+              </a:effectLst>
+            </a:endParaRPr>
           </a:p>
         </p:txBody>
       </p:sp>
